--- a/projects/如何成为PPT高手/最终文档/ppt_slides/slide_02.pptx
+++ b/projects/如何成为PPT高手/最终文档/ppt_slides/slide_02.pptx
@@ -3096,8 +3096,8 @@
         </p:nvSpPr>
         <p:spPr>
           <a:xfrm>
-            <a:off x="731520" y="548640"/>
-            <a:ext cx="9144000" cy="731520"/>
+            <a:off x="731520" y="457200"/>
+            <a:ext cx="7315200" cy="731520"/>
           </a:xfrm>
           <a:prstGeom prst="rect">
             <a:avLst/>
@@ -3111,9 +3111,9 @@
           <a:lstStyle/>
           <a:p>
             <a:pPr>
-              <a:defRPr sz="3200" b="1">
+              <a:defRPr sz="3600" b="1">
                 <a:solidFill>
-                  <a:srgbClr val="1B5EB8"/>
+                  <a:srgbClr val="1A56BA"/>
                 </a:solidFill>
                 <a:latin typeface="Microsoft YaHei"/>
               </a:defRPr>
@@ -3132,8 +3132,8 @@
         </p:nvSpPr>
         <p:spPr>
           <a:xfrm>
-            <a:off x="731520" y="1280160"/>
-            <a:ext cx="9144000" cy="457200"/>
+            <a:off x="731520" y="1188720"/>
+            <a:ext cx="7315200" cy="457200"/>
           </a:xfrm>
           <a:prstGeom prst="rect">
             <a:avLst/>
@@ -3147,9 +3147,9 @@
           <a:lstStyle/>
           <a:p>
             <a:pPr>
-              <a:defRPr sz="1800" b="1">
+              <a:defRPr sz="2000" b="1">
                 <a:solidFill>
-                  <a:srgbClr val="404040"/>
+                  <a:srgbClr val="333333"/>
                 </a:solidFill>
                 <a:latin typeface="Microsoft YaHei"/>
               </a:defRPr>
@@ -3168,17 +3168,16 @@
         </p:nvSpPr>
         <p:spPr>
           <a:xfrm>
-            <a:off x="1645920" y="2548889"/>
-            <a:ext cx="365760" cy="22860"/>
+            <a:off x="1645920" y="2377440"/>
+            <a:ext cx="12700" cy="3291840"/>
           </a:xfrm>
           <a:prstGeom prst="rect">
             <a:avLst/>
           </a:prstGeom>
-          <a:solidFill>
-            <a:srgbClr val="4A86C8"/>
-          </a:solidFill>
-          <a:ln>
-            <a:noFill/>
+          <a:ln w="19050">
+            <a:solidFill>
+              <a:srgbClr val="3B7EC6"/>
+            </a:solidFill>
           </a:ln>
         </p:spPr>
         <p:style>
@@ -3205,23 +3204,25 @@
       </p:sp>
       <p:sp>
         <p:nvSpPr>
-          <p:cNvPr id="5" name="Rectangle 4"/>
+          <p:cNvPr id="5" name="Oval 4"/>
           <p:cNvSpPr/>
           <p:nvPr/>
         </p:nvSpPr>
         <p:spPr>
           <a:xfrm>
-            <a:off x="1634490" y="2560320"/>
-            <a:ext cx="22860" cy="1097280"/>
-          </a:xfrm>
-          <a:prstGeom prst="rect">
+            <a:off x="1572768" y="2304288"/>
+            <a:ext cx="146304" cy="146304"/>
+          </a:xfrm>
+          <a:prstGeom prst="ellipse">
             <a:avLst/>
           </a:prstGeom>
           <a:solidFill>
-            <a:srgbClr val="4A86C8"/>
+            <a:srgbClr val="FFFFFF"/>
           </a:solidFill>
-          <a:ln>
-            <a:noFill/>
+          <a:ln w="25400">
+            <a:solidFill>
+              <a:srgbClr val="3B7EC6"/>
+            </a:solidFill>
           </a:ln>
         </p:spPr>
         <p:style>
@@ -3254,17 +3255,16 @@
         </p:nvSpPr>
         <p:spPr>
           <a:xfrm>
-            <a:off x="1645920" y="3646170"/>
-            <a:ext cx="1463040" cy="22860"/>
+            <a:off x="1719072" y="2377440"/>
+            <a:ext cx="109728" cy="12700"/>
           </a:xfrm>
           <a:prstGeom prst="rect">
             <a:avLst/>
           </a:prstGeom>
-          <a:solidFill>
-            <a:srgbClr val="4A86C8"/>
-          </a:solidFill>
-          <a:ln>
-            <a:noFill/>
+          <a:ln w="19050">
+            <a:solidFill>
+              <a:srgbClr val="3B7EC6"/>
+            </a:solidFill>
           </a:ln>
         </p:spPr>
         <p:style>
@@ -3291,20 +3291,20 @@
       </p:sp>
       <p:sp>
         <p:nvSpPr>
-          <p:cNvPr id="7" name="Rectangle 6"/>
+          <p:cNvPr id="7" name="Rounded Rectangle 6"/>
           <p:cNvSpPr/>
           <p:nvPr/>
         </p:nvSpPr>
         <p:spPr>
           <a:xfrm>
-            <a:off x="2731770" y="3657600"/>
-            <a:ext cx="22860" cy="1097280"/>
-          </a:xfrm>
-          <a:prstGeom prst="rect">
+            <a:off x="1883664" y="2112264"/>
+            <a:ext cx="5303520" cy="640080"/>
+          </a:xfrm>
+          <a:prstGeom prst="roundRect">
             <a:avLst/>
           </a:prstGeom>
           <a:solidFill>
-            <a:srgbClr val="4A86C8"/>
+            <a:srgbClr val="F0F4F8"/>
           </a:solidFill>
           <a:ln>
             <a:noFill/>
@@ -3334,23 +3334,25 @@
       </p:sp>
       <p:sp>
         <p:nvSpPr>
-          <p:cNvPr id="8" name="Rectangle 7"/>
+          <p:cNvPr id="8" name="Rounded Rectangle 7"/>
           <p:cNvSpPr/>
           <p:nvPr/>
         </p:nvSpPr>
         <p:spPr>
           <a:xfrm>
-            <a:off x="2743200" y="4743450"/>
-            <a:ext cx="1463040" cy="22860"/>
-          </a:xfrm>
-          <a:prstGeom prst="rect">
+            <a:off x="1828800" y="2057400"/>
+            <a:ext cx="5303520" cy="640080"/>
+          </a:xfrm>
+          <a:prstGeom prst="roundRect">
             <a:avLst/>
           </a:prstGeom>
           <a:solidFill>
-            <a:srgbClr val="4A86C8"/>
+            <a:srgbClr val="FFFFFF"/>
           </a:solidFill>
-          <a:ln>
-            <a:noFill/>
+          <a:ln w="12700">
+            <a:solidFill>
+              <a:srgbClr val="E8E8E8"/>
+            </a:solidFill>
           </a:ln>
         </p:spPr>
         <p:style>
@@ -3368,32 +3370,50 @@
           </a:fontRef>
         </p:style>
         <p:txBody>
-          <a:bodyPr rtlCol="0" anchor="ctr"/>
+          <a:bodyPr rtlCol="0" anchor="ctr" lIns="274320" tIns="137160"/>
           <a:lstStyle/>
           <a:p>
             <a:pPr algn="ctr"/>
-          </a:p>
-        </p:txBody>
-      </p:sp>
-      <p:sp>
-        <p:nvSpPr>
-          <p:cNvPr id="9" name="Rectangle 8"/>
+            <a:r>
+              <a:rPr sz="1800" b="1">
+                <a:solidFill>
+                  <a:srgbClr val="000000"/>
+                </a:solidFill>
+                <a:latin typeface="Microsoft YaHei"/>
+              </a:rPr>
+              <a:t>1. 内容法则：一页一事，</a:t>
+            </a:r>
+            <a:r>
+              <a:rPr sz="1800" b="1">
+                <a:solidFill>
+                  <a:srgbClr val="DE9B35"/>
+                </a:solidFill>
+                <a:latin typeface="Microsoft YaHei"/>
+              </a:rPr>
+              <a:t>结论先行</a:t>
+            </a:r>
+          </a:p>
+        </p:txBody>
+      </p:sp>
+      <p:sp>
+        <p:nvSpPr>
+          <p:cNvPr id="9" name="Rounded Rectangle 8"/>
           <p:cNvSpPr/>
           <p:nvPr/>
         </p:nvSpPr>
         <p:spPr>
           <a:xfrm>
-            <a:off x="3829050" y="4754880"/>
-            <a:ext cx="22860" cy="1097280"/>
-          </a:xfrm>
-          <a:prstGeom prst="rect">
-            <a:avLst/>
-          </a:prstGeom>
-          <a:solidFill>
-            <a:srgbClr val="4A86C8"/>
-          </a:solidFill>
-          <a:ln>
-            <a:noFill/>
+            <a:off x="731520" y="2011680"/>
+            <a:ext cx="457200" cy="640080"/>
+          </a:xfrm>
+          <a:prstGeom prst="roundRect">
+            <a:avLst/>
+          </a:prstGeom>
+          <a:noFill/>
+          <a:ln w="25400">
+            <a:solidFill>
+              <a:srgbClr val="3B7EC6"/>
+            </a:solidFill>
           </a:ln>
         </p:spPr>
         <p:style>
@@ -3426,17 +3446,16 @@
         </p:nvSpPr>
         <p:spPr>
           <a:xfrm>
-            <a:off x="3840480" y="5840730"/>
-            <a:ext cx="1463040" cy="22860"/>
+            <a:off x="822960" y="2194560"/>
+            <a:ext cx="274320" cy="12700"/>
           </a:xfrm>
           <a:prstGeom prst="rect">
             <a:avLst/>
           </a:prstGeom>
-          <a:solidFill>
-            <a:srgbClr val="4A86C8"/>
-          </a:solidFill>
-          <a:ln>
-            <a:noFill/>
+          <a:ln w="19050">
+            <a:solidFill>
+              <a:srgbClr val="3B7EC6"/>
+            </a:solidFill>
           </a:ln>
         </p:spPr>
         <p:style>
@@ -3463,22 +3482,21 @@
       </p:sp>
       <p:sp>
         <p:nvSpPr>
-          <p:cNvPr id="11" name="Rounded Rectangle 10"/>
+          <p:cNvPr id="11" name="Rectangle 10"/>
           <p:cNvSpPr/>
           <p:nvPr/>
         </p:nvSpPr>
         <p:spPr>
           <a:xfrm>
-            <a:off x="914400" y="2286000"/>
-            <a:ext cx="457200" cy="548640"/>
-          </a:xfrm>
-          <a:prstGeom prst="roundRect">
-            <a:avLst/>
-          </a:prstGeom>
-          <a:noFill/>
+            <a:off x="822960" y="2331720"/>
+            <a:ext cx="274320" cy="12700"/>
+          </a:xfrm>
+          <a:prstGeom prst="rect">
+            <a:avLst/>
+          </a:prstGeom>
           <a:ln w="19050">
             <a:solidFill>
-              <a:srgbClr val="4A86C8"/>
+              <a:srgbClr val="3B7EC6"/>
             </a:solidFill>
           </a:ln>
         </p:spPr>
@@ -3506,22 +3524,21 @@
       </p:sp>
       <p:sp>
         <p:nvSpPr>
-          <p:cNvPr id="12" name="Can 11"/>
+          <p:cNvPr id="12" name="Rectangle 11"/>
           <p:cNvSpPr/>
           <p:nvPr/>
         </p:nvSpPr>
         <p:spPr>
           <a:xfrm>
-            <a:off x="2194560" y="3429000"/>
-            <a:ext cx="365760" cy="457200"/>
-          </a:xfrm>
-          <a:prstGeom prst="can">
-            <a:avLst/>
-          </a:prstGeom>
-          <a:noFill/>
+            <a:off x="822960" y="2468879"/>
+            <a:ext cx="274320" cy="12700"/>
+          </a:xfrm>
+          <a:prstGeom prst="rect">
+            <a:avLst/>
+          </a:prstGeom>
           <a:ln w="19050">
             <a:solidFill>
-              <a:srgbClr val="4A86C8"/>
+              <a:srgbClr val="3B7EC6"/>
             </a:solidFill>
           </a:ln>
         </p:spPr>
@@ -3549,22 +3566,24 @@
       </p:sp>
       <p:sp>
         <p:nvSpPr>
-          <p:cNvPr id="13" name="Sun 12"/>
+          <p:cNvPr id="13" name="Oval 12"/>
           <p:cNvSpPr/>
           <p:nvPr/>
         </p:nvSpPr>
         <p:spPr>
           <a:xfrm>
-            <a:off x="3291840" y="4526280"/>
-            <a:ext cx="457200" cy="457200"/>
-          </a:xfrm>
-          <a:prstGeom prst="sun">
-            <a:avLst/>
-          </a:prstGeom>
-          <a:noFill/>
-          <a:ln w="19050">
+            <a:off x="1051560" y="2331720"/>
+            <a:ext cx="274320" cy="274320"/>
+          </a:xfrm>
+          <a:prstGeom prst="ellipse">
+            <a:avLst/>
+          </a:prstGeom>
+          <a:solidFill>
+            <a:srgbClr val="FFFFFF"/>
+          </a:solidFill>
+          <a:ln w="25400">
             <a:solidFill>
-              <a:srgbClr val="4A86C8"/>
+              <a:srgbClr val="3B7EC6"/>
             </a:solidFill>
           </a:ln>
         </p:spPr>
@@ -3592,22 +3611,21 @@
       </p:sp>
       <p:sp>
         <p:nvSpPr>
-          <p:cNvPr id="14" name="Isosceles Triangle 13"/>
+          <p:cNvPr id="14" name="Rectangle 13"/>
           <p:cNvSpPr/>
           <p:nvPr/>
         </p:nvSpPr>
         <p:spPr>
           <a:xfrm>
-            <a:off x="4389120" y="5623560"/>
-            <a:ext cx="457200" cy="457200"/>
-          </a:xfrm>
-          <a:prstGeom prst="triangle">
-            <a:avLst/>
-          </a:prstGeom>
-          <a:noFill/>
-          <a:ln w="19050">
+            <a:off x="1115568" y="2468880"/>
+            <a:ext cx="54864" cy="54864"/>
+          </a:xfrm>
+          <a:prstGeom prst="rect">
+            <a:avLst/>
+          </a:prstGeom>
+          <a:ln w="25400">
             <a:solidFill>
-              <a:srgbClr val="4A86C8"/>
+              <a:srgbClr val="3B7EC6"/>
             </a:solidFill>
           </a:ln>
         </p:spPr>
@@ -3635,24 +3653,21 @@
       </p:sp>
       <p:sp>
         <p:nvSpPr>
-          <p:cNvPr id="15" name="Oval 14"/>
+          <p:cNvPr id="15" name="Rectangle 14"/>
           <p:cNvSpPr/>
           <p:nvPr/>
         </p:nvSpPr>
         <p:spPr>
           <a:xfrm>
-            <a:off x="1591056" y="2505456"/>
-            <a:ext cx="109728" cy="109728"/>
-          </a:xfrm>
-          <a:prstGeom prst="ellipse">
-            <a:avLst/>
-          </a:prstGeom>
-          <a:solidFill>
-            <a:srgbClr val="FFFFFF"/>
-          </a:solidFill>
-          <a:ln w="19050">
+            <a:off x="1170432" y="2395728"/>
+            <a:ext cx="91440" cy="128016"/>
+          </a:xfrm>
+          <a:prstGeom prst="rect">
+            <a:avLst/>
+          </a:prstGeom>
+          <a:ln w="25400">
             <a:solidFill>
-              <a:srgbClr val="4A86C8"/>
+              <a:srgbClr val="3B7EC6"/>
             </a:solidFill>
           </a:ln>
         </p:spPr>
@@ -3686,8 +3701,8 @@
         </p:nvSpPr>
         <p:spPr>
           <a:xfrm>
-            <a:off x="1591056" y="3602736"/>
-            <a:ext cx="109728" cy="109728"/>
+            <a:off x="1572768" y="3401568"/>
+            <a:ext cx="146304" cy="146304"/>
           </a:xfrm>
           <a:prstGeom prst="ellipse">
             <a:avLst/>
@@ -3695,9 +3710,9 @@
           <a:solidFill>
             <a:srgbClr val="FFFFFF"/>
           </a:solidFill>
-          <a:ln w="19050">
+          <a:ln w="25400">
             <a:solidFill>
-              <a:srgbClr val="4A86C8"/>
+              <a:srgbClr val="3B7EC6"/>
             </a:solidFill>
           </a:ln>
         </p:spPr>
@@ -3725,24 +3740,21 @@
       </p:sp>
       <p:sp>
         <p:nvSpPr>
-          <p:cNvPr id="17" name="Oval 16"/>
+          <p:cNvPr id="17" name="Rectangle 16"/>
           <p:cNvSpPr/>
           <p:nvPr/>
         </p:nvSpPr>
         <p:spPr>
           <a:xfrm>
-            <a:off x="2688336" y="4700016"/>
-            <a:ext cx="109728" cy="109728"/>
-          </a:xfrm>
-          <a:prstGeom prst="ellipse">
-            <a:avLst/>
-          </a:prstGeom>
-          <a:solidFill>
-            <a:srgbClr val="FFFFFF"/>
-          </a:solidFill>
+            <a:off x="1719072" y="3474720"/>
+            <a:ext cx="475488" cy="12700"/>
+          </a:xfrm>
+          <a:prstGeom prst="rect">
+            <a:avLst/>
+          </a:prstGeom>
           <a:ln w="19050">
             <a:solidFill>
-              <a:srgbClr val="4A86C8"/>
+              <a:srgbClr val="3B7EC6"/>
             </a:solidFill>
           </a:ln>
         </p:spPr>
@@ -3770,25 +3782,23 @@
       </p:sp>
       <p:sp>
         <p:nvSpPr>
-          <p:cNvPr id="18" name="Oval 17"/>
+          <p:cNvPr id="18" name="Rounded Rectangle 17"/>
           <p:cNvSpPr/>
           <p:nvPr/>
         </p:nvSpPr>
         <p:spPr>
           <a:xfrm>
-            <a:off x="3785616" y="5797296"/>
-            <a:ext cx="109728" cy="109728"/>
-          </a:xfrm>
-          <a:prstGeom prst="ellipse">
+            <a:off x="3163824" y="3209543"/>
+            <a:ext cx="5852160" cy="640080"/>
+          </a:xfrm>
+          <a:prstGeom prst="roundRect">
             <a:avLst/>
           </a:prstGeom>
           <a:solidFill>
-            <a:srgbClr val="FFFFFF"/>
+            <a:srgbClr val="F0F4F8"/>
           </a:solidFill>
-          <a:ln w="19050">
-            <a:solidFill>
-              <a:srgbClr val="4A86C8"/>
-            </a:solidFill>
+          <a:ln>
+            <a:noFill/>
           </a:ln>
         </p:spPr>
         <p:style>
@@ -3821,8 +3831,8 @@
         </p:nvSpPr>
         <p:spPr>
           <a:xfrm>
-            <a:off x="2011680" y="2194560"/>
-            <a:ext cx="5303520" cy="731520"/>
+            <a:off x="3108960" y="3154679"/>
+            <a:ext cx="5852160" cy="640080"/>
           </a:xfrm>
           <a:prstGeom prst="roundRect">
             <a:avLst/>
@@ -3832,7 +3842,7 @@
           </a:solidFill>
           <a:ln w="12700">
             <a:solidFill>
-              <a:srgbClr val="E0E0E0"/>
+              <a:srgbClr val="E8E8E8"/>
             </a:solidFill>
           </a:ln>
         </p:spPr>
@@ -3851,41 +3861,552 @@
           </a:fontRef>
         </p:style>
         <p:txBody>
-          <a:bodyPr rtlCol="0" anchor="ctr" lIns="182880"/>
-          <a:lstStyle/>
-          <a:p>
-            <a:pPr algn="l"/>
-            <a:r>
-              <a:rPr sz="1600" b="1">
+          <a:bodyPr rtlCol="0" anchor="ctr" lIns="274320" tIns="137160"/>
+          <a:lstStyle/>
+          <a:p>
+            <a:pPr algn="ctr"/>
+            <a:r>
+              <a:rPr sz="1800" b="1">
                 <a:solidFill>
-                  <a:srgbClr val="202020"/>
+                  <a:srgbClr val="000000"/>
                 </a:solidFill>
                 <a:latin typeface="Microsoft YaHei"/>
               </a:rPr>
-              <a:t>1. 内容法则：一页一事，</a:t>
-            </a:r>
-            <a:r>
-              <a:rPr sz="1600" b="1">
+              <a:t>2. 减法艺术：拒绝文字堆砌，追求</a:t>
+            </a:r>
+            <a:r>
+              <a:rPr sz="1800" b="1">
                 <a:solidFill>
-                  <a:srgbClr val="DF9A2A"/>
+                  <a:srgbClr val="DE9B35"/>
                 </a:solidFill>
                 <a:latin typeface="Microsoft YaHei"/>
               </a:rPr>
-              <a:t>结论先行</a:t>
-            </a:r>
-          </a:p>
-        </p:txBody>
-      </p:sp>
-      <p:sp>
-        <p:nvSpPr>
-          <p:cNvPr id="20" name="Rounded Rectangle 19"/>
+              <a:t>秒懂</a:t>
+            </a:r>
+          </a:p>
+        </p:txBody>
+      </p:sp>
+      <p:sp>
+        <p:nvSpPr>
+          <p:cNvPr id="20" name="Rectangle 19"/>
           <p:cNvSpPr/>
           <p:nvPr/>
         </p:nvSpPr>
         <p:spPr>
           <a:xfrm>
-            <a:off x="3108960" y="3291840"/>
-            <a:ext cx="5303520" cy="731520"/>
+            <a:off x="2240280" y="3291839"/>
+            <a:ext cx="320040" cy="411480"/>
+          </a:xfrm>
+          <a:prstGeom prst="rect">
+            <a:avLst/>
+          </a:prstGeom>
+          <a:noFill/>
+          <a:ln w="25400">
+            <a:solidFill>
+              <a:srgbClr val="3B7EC6"/>
+            </a:solidFill>
+          </a:ln>
+        </p:spPr>
+        <p:style>
+          <a:lnRef idx="1">
+            <a:schemeClr val="accent1"/>
+          </a:lnRef>
+          <a:fillRef idx="3">
+            <a:schemeClr val="accent1"/>
+          </a:fillRef>
+          <a:effectRef idx="2">
+            <a:schemeClr val="accent1"/>
+          </a:effectRef>
+          <a:fontRef idx="minor">
+            <a:schemeClr val="lt1"/>
+          </a:fontRef>
+        </p:style>
+        <p:txBody>
+          <a:bodyPr rtlCol="0" anchor="ctr"/>
+          <a:lstStyle/>
+          <a:p>
+            <a:pPr algn="ctr"/>
+          </a:p>
+        </p:txBody>
+      </p:sp>
+      <p:sp>
+        <p:nvSpPr>
+          <p:cNvPr id="21" name="Rounded Rectangle 20"/>
+          <p:cNvSpPr/>
+          <p:nvPr/>
+        </p:nvSpPr>
+        <p:spPr>
+          <a:xfrm>
+            <a:off x="2148840" y="3200400"/>
+            <a:ext cx="502920" cy="73152"/>
+          </a:xfrm>
+          <a:prstGeom prst="roundRect">
+            <a:avLst/>
+          </a:prstGeom>
+          <a:noFill/>
+          <a:ln w="25400">
+            <a:solidFill>
+              <a:srgbClr val="3B7EC6"/>
+            </a:solidFill>
+          </a:ln>
+        </p:spPr>
+        <p:style>
+          <a:lnRef idx="1">
+            <a:schemeClr val="accent1"/>
+          </a:lnRef>
+          <a:fillRef idx="3">
+            <a:schemeClr val="accent1"/>
+          </a:fillRef>
+          <a:effectRef idx="2">
+            <a:schemeClr val="accent1"/>
+          </a:effectRef>
+          <a:fontRef idx="minor">
+            <a:schemeClr val="lt1"/>
+          </a:fontRef>
+        </p:style>
+        <p:txBody>
+          <a:bodyPr rtlCol="0" anchor="ctr"/>
+          <a:lstStyle/>
+          <a:p>
+            <a:pPr algn="ctr"/>
+          </a:p>
+        </p:txBody>
+      </p:sp>
+      <p:sp>
+        <p:nvSpPr>
+          <p:cNvPr id="22" name="Rectangle 21"/>
+          <p:cNvSpPr/>
+          <p:nvPr/>
+        </p:nvSpPr>
+        <p:spPr>
+          <a:xfrm>
+            <a:off x="2331720" y="3127248"/>
+            <a:ext cx="137160" cy="73152"/>
+          </a:xfrm>
+          <a:prstGeom prst="rect">
+            <a:avLst/>
+          </a:prstGeom>
+          <a:noFill/>
+          <a:ln w="19050">
+            <a:solidFill>
+              <a:srgbClr val="3B7EC6"/>
+            </a:solidFill>
+          </a:ln>
+        </p:spPr>
+        <p:style>
+          <a:lnRef idx="1">
+            <a:schemeClr val="accent1"/>
+          </a:lnRef>
+          <a:fillRef idx="3">
+            <a:schemeClr val="accent1"/>
+          </a:fillRef>
+          <a:effectRef idx="2">
+            <a:schemeClr val="accent1"/>
+          </a:effectRef>
+          <a:fontRef idx="minor">
+            <a:schemeClr val="lt1"/>
+          </a:fontRef>
+        </p:style>
+        <p:txBody>
+          <a:bodyPr rtlCol="0" anchor="ctr"/>
+          <a:lstStyle/>
+          <a:p>
+            <a:pPr algn="ctr"/>
+          </a:p>
+        </p:txBody>
+      </p:sp>
+      <p:sp>
+        <p:nvSpPr>
+          <p:cNvPr id="23" name="Rectangle 22"/>
+          <p:cNvSpPr/>
+          <p:nvPr/>
+        </p:nvSpPr>
+        <p:spPr>
+          <a:xfrm>
+            <a:off x="2331720" y="3337560"/>
+            <a:ext cx="12700" cy="320040"/>
+          </a:xfrm>
+          <a:prstGeom prst="rect">
+            <a:avLst/>
+          </a:prstGeom>
+          <a:ln w="19050">
+            <a:solidFill>
+              <a:srgbClr val="3B7EC6"/>
+            </a:solidFill>
+          </a:ln>
+        </p:spPr>
+        <p:style>
+          <a:lnRef idx="1">
+            <a:schemeClr val="accent1"/>
+          </a:lnRef>
+          <a:fillRef idx="3">
+            <a:schemeClr val="accent1"/>
+          </a:fillRef>
+          <a:effectRef idx="2">
+            <a:schemeClr val="accent1"/>
+          </a:effectRef>
+          <a:fontRef idx="minor">
+            <a:schemeClr val="lt1"/>
+          </a:fontRef>
+        </p:style>
+        <p:txBody>
+          <a:bodyPr rtlCol="0" anchor="ctr"/>
+          <a:lstStyle/>
+          <a:p>
+            <a:pPr algn="ctr"/>
+          </a:p>
+        </p:txBody>
+      </p:sp>
+      <p:sp>
+        <p:nvSpPr>
+          <p:cNvPr id="24" name="Rectangle 23"/>
+          <p:cNvSpPr/>
+          <p:nvPr/>
+        </p:nvSpPr>
+        <p:spPr>
+          <a:xfrm>
+            <a:off x="2404872" y="3337560"/>
+            <a:ext cx="12700" cy="320040"/>
+          </a:xfrm>
+          <a:prstGeom prst="rect">
+            <a:avLst/>
+          </a:prstGeom>
+          <a:ln w="19050">
+            <a:solidFill>
+              <a:srgbClr val="3B7EC6"/>
+            </a:solidFill>
+          </a:ln>
+        </p:spPr>
+        <p:style>
+          <a:lnRef idx="1">
+            <a:schemeClr val="accent1"/>
+          </a:lnRef>
+          <a:fillRef idx="3">
+            <a:schemeClr val="accent1"/>
+          </a:fillRef>
+          <a:effectRef idx="2">
+            <a:schemeClr val="accent1"/>
+          </a:effectRef>
+          <a:fontRef idx="minor">
+            <a:schemeClr val="lt1"/>
+          </a:fontRef>
+        </p:style>
+        <p:txBody>
+          <a:bodyPr rtlCol="0" anchor="ctr"/>
+          <a:lstStyle/>
+          <a:p>
+            <a:pPr algn="ctr"/>
+          </a:p>
+        </p:txBody>
+      </p:sp>
+      <p:sp>
+        <p:nvSpPr>
+          <p:cNvPr id="25" name="Rectangle 24"/>
+          <p:cNvSpPr/>
+          <p:nvPr/>
+        </p:nvSpPr>
+        <p:spPr>
+          <a:xfrm>
+            <a:off x="2478024" y="3337560"/>
+            <a:ext cx="12700" cy="320040"/>
+          </a:xfrm>
+          <a:prstGeom prst="rect">
+            <a:avLst/>
+          </a:prstGeom>
+          <a:ln w="19050">
+            <a:solidFill>
+              <a:srgbClr val="3B7EC6"/>
+            </a:solidFill>
+          </a:ln>
+        </p:spPr>
+        <p:style>
+          <a:lnRef idx="1">
+            <a:schemeClr val="accent1"/>
+          </a:lnRef>
+          <a:fillRef idx="3">
+            <a:schemeClr val="accent1"/>
+          </a:fillRef>
+          <a:effectRef idx="2">
+            <a:schemeClr val="accent1"/>
+          </a:effectRef>
+          <a:fontRef idx="minor">
+            <a:schemeClr val="lt1"/>
+          </a:fontRef>
+        </p:style>
+        <p:txBody>
+          <a:bodyPr rtlCol="0" anchor="ctr"/>
+          <a:lstStyle/>
+          <a:p>
+            <a:pPr algn="ctr"/>
+          </a:p>
+        </p:txBody>
+      </p:sp>
+      <p:sp>
+        <p:nvSpPr>
+          <p:cNvPr id="26" name="Rectangle 25"/>
+          <p:cNvSpPr/>
+          <p:nvPr/>
+        </p:nvSpPr>
+        <p:spPr>
+          <a:xfrm>
+            <a:off x="2697480" y="3383279"/>
+            <a:ext cx="274320" cy="12700"/>
+          </a:xfrm>
+          <a:prstGeom prst="rect">
+            <a:avLst/>
+          </a:prstGeom>
+          <a:ln w="25400">
+            <a:solidFill>
+              <a:srgbClr val="3B7EC6"/>
+            </a:solidFill>
+          </a:ln>
+        </p:spPr>
+        <p:style>
+          <a:lnRef idx="1">
+            <a:schemeClr val="accent1"/>
+          </a:lnRef>
+          <a:fillRef idx="3">
+            <a:schemeClr val="accent1"/>
+          </a:fillRef>
+          <a:effectRef idx="2">
+            <a:schemeClr val="accent1"/>
+          </a:effectRef>
+          <a:fontRef idx="minor">
+            <a:schemeClr val="lt1"/>
+          </a:fontRef>
+        </p:style>
+        <p:txBody>
+          <a:bodyPr rtlCol="0" anchor="ctr"/>
+          <a:lstStyle/>
+          <a:p>
+            <a:pPr algn="ctr"/>
+          </a:p>
+        </p:txBody>
+      </p:sp>
+      <p:sp>
+        <p:nvSpPr>
+          <p:cNvPr id="27" name="Rectangle 26"/>
+          <p:cNvSpPr/>
+          <p:nvPr/>
+        </p:nvSpPr>
+        <p:spPr>
+          <a:xfrm>
+            <a:off x="2697480" y="3520439"/>
+            <a:ext cx="274320" cy="12700"/>
+          </a:xfrm>
+          <a:prstGeom prst="rect">
+            <a:avLst/>
+          </a:prstGeom>
+          <a:ln w="25400">
+            <a:solidFill>
+              <a:srgbClr val="3B7EC6"/>
+            </a:solidFill>
+          </a:ln>
+        </p:spPr>
+        <p:style>
+          <a:lnRef idx="1">
+            <a:schemeClr val="accent1"/>
+          </a:lnRef>
+          <a:fillRef idx="3">
+            <a:schemeClr val="accent1"/>
+          </a:fillRef>
+          <a:effectRef idx="2">
+            <a:schemeClr val="accent1"/>
+          </a:effectRef>
+          <a:fontRef idx="minor">
+            <a:schemeClr val="lt1"/>
+          </a:fontRef>
+        </p:style>
+        <p:txBody>
+          <a:bodyPr rtlCol="0" anchor="ctr"/>
+          <a:lstStyle/>
+          <a:p>
+            <a:pPr algn="ctr"/>
+          </a:p>
+        </p:txBody>
+      </p:sp>
+      <p:sp>
+        <p:nvSpPr>
+          <p:cNvPr id="28" name="Rectangle 27"/>
+          <p:cNvSpPr/>
+          <p:nvPr/>
+        </p:nvSpPr>
+        <p:spPr>
+          <a:xfrm>
+            <a:off x="2697480" y="3657599"/>
+            <a:ext cx="274320" cy="12700"/>
+          </a:xfrm>
+          <a:prstGeom prst="rect">
+            <a:avLst/>
+          </a:prstGeom>
+          <a:ln w="25400">
+            <a:solidFill>
+              <a:srgbClr val="3B7EC6"/>
+            </a:solidFill>
+          </a:ln>
+        </p:spPr>
+        <p:style>
+          <a:lnRef idx="1">
+            <a:schemeClr val="accent1"/>
+          </a:lnRef>
+          <a:fillRef idx="3">
+            <a:schemeClr val="accent1"/>
+          </a:fillRef>
+          <a:effectRef idx="2">
+            <a:schemeClr val="accent1"/>
+          </a:effectRef>
+          <a:fontRef idx="minor">
+            <a:schemeClr val="lt1"/>
+          </a:fontRef>
+        </p:style>
+        <p:txBody>
+          <a:bodyPr rtlCol="0" anchor="ctr"/>
+          <a:lstStyle/>
+          <a:p>
+            <a:pPr algn="ctr"/>
+          </a:p>
+        </p:txBody>
+      </p:sp>
+      <p:sp>
+        <p:nvSpPr>
+          <p:cNvPr id="29" name="Oval 28"/>
+          <p:cNvSpPr/>
+          <p:nvPr/>
+        </p:nvSpPr>
+        <p:spPr>
+          <a:xfrm>
+            <a:off x="1572768" y="4498848"/>
+            <a:ext cx="146304" cy="146304"/>
+          </a:xfrm>
+          <a:prstGeom prst="ellipse">
+            <a:avLst/>
+          </a:prstGeom>
+          <a:solidFill>
+            <a:srgbClr val="FFFFFF"/>
+          </a:solidFill>
+          <a:ln w="25400">
+            <a:solidFill>
+              <a:srgbClr val="3B7EC6"/>
+            </a:solidFill>
+          </a:ln>
+        </p:spPr>
+        <p:style>
+          <a:lnRef idx="1">
+            <a:schemeClr val="accent1"/>
+          </a:lnRef>
+          <a:fillRef idx="3">
+            <a:schemeClr val="accent1"/>
+          </a:fillRef>
+          <a:effectRef idx="2">
+            <a:schemeClr val="accent1"/>
+          </a:effectRef>
+          <a:fontRef idx="minor">
+            <a:schemeClr val="lt1"/>
+          </a:fontRef>
+        </p:style>
+        <p:txBody>
+          <a:bodyPr rtlCol="0" anchor="ctr"/>
+          <a:lstStyle/>
+          <a:p>
+            <a:pPr algn="ctr"/>
+          </a:p>
+        </p:txBody>
+      </p:sp>
+      <p:sp>
+        <p:nvSpPr>
+          <p:cNvPr id="30" name="Rectangle 29"/>
+          <p:cNvSpPr/>
+          <p:nvPr/>
+        </p:nvSpPr>
+        <p:spPr>
+          <a:xfrm>
+            <a:off x="1719072" y="4572000"/>
+            <a:ext cx="1389888" cy="12700"/>
+          </a:xfrm>
+          <a:prstGeom prst="rect">
+            <a:avLst/>
+          </a:prstGeom>
+          <a:ln w="19050">
+            <a:solidFill>
+              <a:srgbClr val="3B7EC6"/>
+            </a:solidFill>
+          </a:ln>
+        </p:spPr>
+        <p:style>
+          <a:lnRef idx="1">
+            <a:schemeClr val="accent1"/>
+          </a:lnRef>
+          <a:fillRef idx="3">
+            <a:schemeClr val="accent1"/>
+          </a:fillRef>
+          <a:effectRef idx="2">
+            <a:schemeClr val="accent1"/>
+          </a:effectRef>
+          <a:fontRef idx="minor">
+            <a:schemeClr val="lt1"/>
+          </a:fontRef>
+        </p:style>
+        <p:txBody>
+          <a:bodyPr rtlCol="0" anchor="ctr"/>
+          <a:lstStyle/>
+          <a:p>
+            <a:pPr algn="ctr"/>
+          </a:p>
+        </p:txBody>
+      </p:sp>
+      <p:sp>
+        <p:nvSpPr>
+          <p:cNvPr id="31" name="Rounded Rectangle 30"/>
+          <p:cNvSpPr/>
+          <p:nvPr/>
+        </p:nvSpPr>
+        <p:spPr>
+          <a:xfrm>
+            <a:off x="3986784" y="4306824"/>
+            <a:ext cx="5852160" cy="640080"/>
+          </a:xfrm>
+          <a:prstGeom prst="roundRect">
+            <a:avLst/>
+          </a:prstGeom>
+          <a:solidFill>
+            <a:srgbClr val="F0F4F8"/>
+          </a:solidFill>
+          <a:ln>
+            <a:noFill/>
+          </a:ln>
+        </p:spPr>
+        <p:style>
+          <a:lnRef idx="1">
+            <a:schemeClr val="accent1"/>
+          </a:lnRef>
+          <a:fillRef idx="3">
+            <a:schemeClr val="accent1"/>
+          </a:fillRef>
+          <a:effectRef idx="2">
+            <a:schemeClr val="accent1"/>
+          </a:effectRef>
+          <a:fontRef idx="minor">
+            <a:schemeClr val="lt1"/>
+          </a:fontRef>
+        </p:style>
+        <p:txBody>
+          <a:bodyPr rtlCol="0" anchor="ctr"/>
+          <a:lstStyle/>
+          <a:p>
+            <a:pPr algn="ctr"/>
+          </a:p>
+        </p:txBody>
+      </p:sp>
+      <p:sp>
+        <p:nvSpPr>
+          <p:cNvPr id="32" name="Rounded Rectangle 31"/>
+          <p:cNvSpPr/>
+          <p:nvPr/>
+        </p:nvSpPr>
+        <p:spPr>
+          <a:xfrm>
+            <a:off x="3931920" y="4251960"/>
+            <a:ext cx="5852160" cy="640080"/>
           </a:xfrm>
           <a:prstGeom prst="roundRect">
             <a:avLst/>
@@ -3895,7 +4416,7 @@
           </a:solidFill>
           <a:ln w="12700">
             <a:solidFill>
-              <a:srgbClr val="E0E0E0"/>
+              <a:srgbClr val="E8E8E8"/>
             </a:solidFill>
           </a:ln>
         </p:spPr>
@@ -3914,41 +4435,595 @@
           </a:fontRef>
         </p:style>
         <p:txBody>
-          <a:bodyPr rtlCol="0" anchor="ctr" lIns="182880"/>
-          <a:lstStyle/>
-          <a:p>
-            <a:pPr algn="l"/>
-            <a:r>
-              <a:rPr sz="1600" b="1">
+          <a:bodyPr rtlCol="0" anchor="ctr" lIns="274320" tIns="137160"/>
+          <a:lstStyle/>
+          <a:p>
+            <a:pPr algn="ctr"/>
+            <a:r>
+              <a:rPr sz="1800" b="1">
                 <a:solidFill>
-                  <a:srgbClr val="202020"/>
+                  <a:srgbClr val="000000"/>
                 </a:solidFill>
                 <a:latin typeface="Microsoft YaHei"/>
               </a:rPr>
-              <a:t>2. 减法艺术：拒绝文字堆砌，追求</a:t>
-            </a:r>
-            <a:r>
-              <a:rPr sz="1600" b="1">
+              <a:t>3. 设计规范：高度统一，建立</a:t>
+            </a:r>
+            <a:r>
+              <a:rPr sz="1800" b="1">
                 <a:solidFill>
-                  <a:srgbClr val="DF9A2A"/>
+                  <a:srgbClr val="DE9B35"/>
                 </a:solidFill>
                 <a:latin typeface="Microsoft YaHei"/>
               </a:rPr>
-              <a:t>秒懂</a:t>
-            </a:r>
-          </a:p>
-        </p:txBody>
-      </p:sp>
-      <p:sp>
-        <p:nvSpPr>
-          <p:cNvPr id="21" name="Rounded Rectangle 20"/>
+              <a:t>专业感</a:t>
+            </a:r>
+          </a:p>
+        </p:txBody>
+      </p:sp>
+      <p:sp>
+        <p:nvSpPr>
+          <p:cNvPr id="33" name="Oval 32"/>
           <p:cNvSpPr/>
           <p:nvPr/>
         </p:nvSpPr>
         <p:spPr>
           <a:xfrm>
-            <a:off x="4206240" y="4389120"/>
-            <a:ext cx="5303520" cy="731520"/>
+            <a:off x="3108960" y="4206240"/>
+            <a:ext cx="365760" cy="365760"/>
+          </a:xfrm>
+          <a:prstGeom prst="ellipse">
+            <a:avLst/>
+          </a:prstGeom>
+          <a:noFill/>
+          <a:ln w="31750">
+            <a:solidFill>
+              <a:srgbClr val="3B7EC6"/>
+            </a:solidFill>
+          </a:ln>
+        </p:spPr>
+        <p:style>
+          <a:lnRef idx="1">
+            <a:schemeClr val="accent1"/>
+          </a:lnRef>
+          <a:fillRef idx="3">
+            <a:schemeClr val="accent1"/>
+          </a:fillRef>
+          <a:effectRef idx="2">
+            <a:schemeClr val="accent1"/>
+          </a:effectRef>
+          <a:fontRef idx="minor">
+            <a:schemeClr val="lt1"/>
+          </a:fontRef>
+        </p:style>
+        <p:txBody>
+          <a:bodyPr rtlCol="0" anchor="ctr"/>
+          <a:lstStyle/>
+          <a:p>
+            <a:pPr algn="ctr"/>
+          </a:p>
+        </p:txBody>
+      </p:sp>
+      <p:sp>
+        <p:nvSpPr>
+          <p:cNvPr id="34" name="Oval 33"/>
+          <p:cNvSpPr/>
+          <p:nvPr/>
+        </p:nvSpPr>
+        <p:spPr>
+          <a:xfrm>
+            <a:off x="3246120" y="4343400"/>
+            <a:ext cx="91440" cy="91440"/>
+          </a:xfrm>
+          <a:prstGeom prst="ellipse">
+            <a:avLst/>
+          </a:prstGeom>
+          <a:noFill/>
+          <a:ln w="19050">
+            <a:solidFill>
+              <a:srgbClr val="3B7EC6"/>
+            </a:solidFill>
+          </a:ln>
+        </p:spPr>
+        <p:style>
+          <a:lnRef idx="1">
+            <a:schemeClr val="accent1"/>
+          </a:lnRef>
+          <a:fillRef idx="3">
+            <a:schemeClr val="accent1"/>
+          </a:fillRef>
+          <a:effectRef idx="2">
+            <a:schemeClr val="accent1"/>
+          </a:effectRef>
+          <a:fontRef idx="minor">
+            <a:schemeClr val="lt1"/>
+          </a:fontRef>
+        </p:style>
+        <p:txBody>
+          <a:bodyPr rtlCol="0" anchor="ctr"/>
+          <a:lstStyle/>
+          <a:p>
+            <a:pPr algn="ctr"/>
+          </a:p>
+        </p:txBody>
+      </p:sp>
+      <p:sp>
+        <p:nvSpPr>
+          <p:cNvPr id="35" name="Oval 34"/>
+          <p:cNvSpPr/>
+          <p:nvPr/>
+        </p:nvSpPr>
+        <p:spPr>
+          <a:xfrm>
+            <a:off x="3429000" y="4343400"/>
+            <a:ext cx="274320" cy="274320"/>
+          </a:xfrm>
+          <a:prstGeom prst="ellipse">
+            <a:avLst/>
+          </a:prstGeom>
+          <a:noFill/>
+          <a:ln w="25400">
+            <a:solidFill>
+              <a:srgbClr val="3B7EC6"/>
+            </a:solidFill>
+          </a:ln>
+        </p:spPr>
+        <p:style>
+          <a:lnRef idx="1">
+            <a:schemeClr val="accent1"/>
+          </a:lnRef>
+          <a:fillRef idx="3">
+            <a:schemeClr val="accent1"/>
+          </a:fillRef>
+          <a:effectRef idx="2">
+            <a:schemeClr val="accent1"/>
+          </a:effectRef>
+          <a:fontRef idx="minor">
+            <a:schemeClr val="lt1"/>
+          </a:fontRef>
+        </p:style>
+        <p:txBody>
+          <a:bodyPr rtlCol="0" anchor="ctr"/>
+          <a:lstStyle/>
+          <a:p>
+            <a:pPr algn="ctr"/>
+          </a:p>
+        </p:txBody>
+      </p:sp>
+      <p:sp>
+        <p:nvSpPr>
+          <p:cNvPr id="36" name="Rectangle 35"/>
+          <p:cNvSpPr/>
+          <p:nvPr/>
+        </p:nvSpPr>
+        <p:spPr>
+          <a:xfrm>
+            <a:off x="3108960" y="4663440"/>
+            <a:ext cx="640080" cy="137160"/>
+          </a:xfrm>
+          <a:prstGeom prst="rect">
+            <a:avLst/>
+          </a:prstGeom>
+          <a:noFill/>
+          <a:ln w="19050">
+            <a:solidFill>
+              <a:srgbClr val="3B7EC6"/>
+            </a:solidFill>
+          </a:ln>
+        </p:spPr>
+        <p:style>
+          <a:lnRef idx="1">
+            <a:schemeClr val="accent1"/>
+          </a:lnRef>
+          <a:fillRef idx="3">
+            <a:schemeClr val="accent1"/>
+          </a:fillRef>
+          <a:effectRef idx="2">
+            <a:schemeClr val="accent1"/>
+          </a:effectRef>
+          <a:fontRef idx="minor">
+            <a:schemeClr val="lt1"/>
+          </a:fontRef>
+        </p:style>
+        <p:txBody>
+          <a:bodyPr rtlCol="0" anchor="ctr"/>
+          <a:lstStyle/>
+          <a:p>
+            <a:pPr algn="ctr"/>
+          </a:p>
+        </p:txBody>
+      </p:sp>
+      <p:sp>
+        <p:nvSpPr>
+          <p:cNvPr id="37" name="Rectangle 36"/>
+          <p:cNvSpPr/>
+          <p:nvPr/>
+        </p:nvSpPr>
+        <p:spPr>
+          <a:xfrm>
+            <a:off x="3154680" y="4663440"/>
+            <a:ext cx="12700" cy="73152"/>
+          </a:xfrm>
+          <a:prstGeom prst="rect">
+            <a:avLst/>
+          </a:prstGeom>
+          <a:ln>
+            <a:solidFill>
+              <a:srgbClr val="3B7EC6"/>
+            </a:solidFill>
+          </a:ln>
+        </p:spPr>
+        <p:style>
+          <a:lnRef idx="1">
+            <a:schemeClr val="accent1"/>
+          </a:lnRef>
+          <a:fillRef idx="3">
+            <a:schemeClr val="accent1"/>
+          </a:fillRef>
+          <a:effectRef idx="2">
+            <a:schemeClr val="accent1"/>
+          </a:effectRef>
+          <a:fontRef idx="minor">
+            <a:schemeClr val="lt1"/>
+          </a:fontRef>
+        </p:style>
+        <p:txBody>
+          <a:bodyPr rtlCol="0" anchor="ctr"/>
+          <a:lstStyle/>
+          <a:p>
+            <a:pPr algn="ctr"/>
+          </a:p>
+        </p:txBody>
+      </p:sp>
+      <p:sp>
+        <p:nvSpPr>
+          <p:cNvPr id="38" name="Rectangle 37"/>
+          <p:cNvSpPr/>
+          <p:nvPr/>
+        </p:nvSpPr>
+        <p:spPr>
+          <a:xfrm>
+            <a:off x="3246120" y="4663440"/>
+            <a:ext cx="12700" cy="73152"/>
+          </a:xfrm>
+          <a:prstGeom prst="rect">
+            <a:avLst/>
+          </a:prstGeom>
+          <a:ln>
+            <a:solidFill>
+              <a:srgbClr val="3B7EC6"/>
+            </a:solidFill>
+          </a:ln>
+        </p:spPr>
+        <p:style>
+          <a:lnRef idx="1">
+            <a:schemeClr val="accent1"/>
+          </a:lnRef>
+          <a:fillRef idx="3">
+            <a:schemeClr val="accent1"/>
+          </a:fillRef>
+          <a:effectRef idx="2">
+            <a:schemeClr val="accent1"/>
+          </a:effectRef>
+          <a:fontRef idx="minor">
+            <a:schemeClr val="lt1"/>
+          </a:fontRef>
+        </p:style>
+        <p:txBody>
+          <a:bodyPr rtlCol="0" anchor="ctr"/>
+          <a:lstStyle/>
+          <a:p>
+            <a:pPr algn="ctr"/>
+          </a:p>
+        </p:txBody>
+      </p:sp>
+      <p:sp>
+        <p:nvSpPr>
+          <p:cNvPr id="39" name="Rectangle 38"/>
+          <p:cNvSpPr/>
+          <p:nvPr/>
+        </p:nvSpPr>
+        <p:spPr>
+          <a:xfrm>
+            <a:off x="3337560" y="4663440"/>
+            <a:ext cx="12700" cy="73152"/>
+          </a:xfrm>
+          <a:prstGeom prst="rect">
+            <a:avLst/>
+          </a:prstGeom>
+          <a:ln>
+            <a:solidFill>
+              <a:srgbClr val="3B7EC6"/>
+            </a:solidFill>
+          </a:ln>
+        </p:spPr>
+        <p:style>
+          <a:lnRef idx="1">
+            <a:schemeClr val="accent1"/>
+          </a:lnRef>
+          <a:fillRef idx="3">
+            <a:schemeClr val="accent1"/>
+          </a:fillRef>
+          <a:effectRef idx="2">
+            <a:schemeClr val="accent1"/>
+          </a:effectRef>
+          <a:fontRef idx="minor">
+            <a:schemeClr val="lt1"/>
+          </a:fontRef>
+        </p:style>
+        <p:txBody>
+          <a:bodyPr rtlCol="0" anchor="ctr"/>
+          <a:lstStyle/>
+          <a:p>
+            <a:pPr algn="ctr"/>
+          </a:p>
+        </p:txBody>
+      </p:sp>
+      <p:sp>
+        <p:nvSpPr>
+          <p:cNvPr id="40" name="Rectangle 39"/>
+          <p:cNvSpPr/>
+          <p:nvPr/>
+        </p:nvSpPr>
+        <p:spPr>
+          <a:xfrm>
+            <a:off x="3429000" y="4663440"/>
+            <a:ext cx="12700" cy="73152"/>
+          </a:xfrm>
+          <a:prstGeom prst="rect">
+            <a:avLst/>
+          </a:prstGeom>
+          <a:ln>
+            <a:solidFill>
+              <a:srgbClr val="3B7EC6"/>
+            </a:solidFill>
+          </a:ln>
+        </p:spPr>
+        <p:style>
+          <a:lnRef idx="1">
+            <a:schemeClr val="accent1"/>
+          </a:lnRef>
+          <a:fillRef idx="3">
+            <a:schemeClr val="accent1"/>
+          </a:fillRef>
+          <a:effectRef idx="2">
+            <a:schemeClr val="accent1"/>
+          </a:effectRef>
+          <a:fontRef idx="minor">
+            <a:schemeClr val="lt1"/>
+          </a:fontRef>
+        </p:style>
+        <p:txBody>
+          <a:bodyPr rtlCol="0" anchor="ctr"/>
+          <a:lstStyle/>
+          <a:p>
+            <a:pPr algn="ctr"/>
+          </a:p>
+        </p:txBody>
+      </p:sp>
+      <p:sp>
+        <p:nvSpPr>
+          <p:cNvPr id="41" name="Rectangle 40"/>
+          <p:cNvSpPr/>
+          <p:nvPr/>
+        </p:nvSpPr>
+        <p:spPr>
+          <a:xfrm>
+            <a:off x="3520440" y="4663440"/>
+            <a:ext cx="12700" cy="73152"/>
+          </a:xfrm>
+          <a:prstGeom prst="rect">
+            <a:avLst/>
+          </a:prstGeom>
+          <a:ln>
+            <a:solidFill>
+              <a:srgbClr val="3B7EC6"/>
+            </a:solidFill>
+          </a:ln>
+        </p:spPr>
+        <p:style>
+          <a:lnRef idx="1">
+            <a:schemeClr val="accent1"/>
+          </a:lnRef>
+          <a:fillRef idx="3">
+            <a:schemeClr val="accent1"/>
+          </a:fillRef>
+          <a:effectRef idx="2">
+            <a:schemeClr val="accent1"/>
+          </a:effectRef>
+          <a:fontRef idx="minor">
+            <a:schemeClr val="lt1"/>
+          </a:fontRef>
+        </p:style>
+        <p:txBody>
+          <a:bodyPr rtlCol="0" anchor="ctr"/>
+          <a:lstStyle/>
+          <a:p>
+            <a:pPr algn="ctr"/>
+          </a:p>
+        </p:txBody>
+      </p:sp>
+      <p:sp>
+        <p:nvSpPr>
+          <p:cNvPr id="42" name="Rectangle 41"/>
+          <p:cNvSpPr/>
+          <p:nvPr/>
+        </p:nvSpPr>
+        <p:spPr>
+          <a:xfrm>
+            <a:off x="3611880" y="4663440"/>
+            <a:ext cx="12700" cy="73152"/>
+          </a:xfrm>
+          <a:prstGeom prst="rect">
+            <a:avLst/>
+          </a:prstGeom>
+          <a:ln>
+            <a:solidFill>
+              <a:srgbClr val="3B7EC6"/>
+            </a:solidFill>
+          </a:ln>
+        </p:spPr>
+        <p:style>
+          <a:lnRef idx="1">
+            <a:schemeClr val="accent1"/>
+          </a:lnRef>
+          <a:fillRef idx="3">
+            <a:schemeClr val="accent1"/>
+          </a:fillRef>
+          <a:effectRef idx="2">
+            <a:schemeClr val="accent1"/>
+          </a:effectRef>
+          <a:fontRef idx="minor">
+            <a:schemeClr val="lt1"/>
+          </a:fontRef>
+        </p:style>
+        <p:txBody>
+          <a:bodyPr rtlCol="0" anchor="ctr"/>
+          <a:lstStyle/>
+          <a:p>
+            <a:pPr algn="ctr"/>
+          </a:p>
+        </p:txBody>
+      </p:sp>
+      <p:sp>
+        <p:nvSpPr>
+          <p:cNvPr id="43" name="Oval 42"/>
+          <p:cNvSpPr/>
+          <p:nvPr/>
+        </p:nvSpPr>
+        <p:spPr>
+          <a:xfrm>
+            <a:off x="1572768" y="5596128"/>
+            <a:ext cx="146304" cy="146304"/>
+          </a:xfrm>
+          <a:prstGeom prst="ellipse">
+            <a:avLst/>
+          </a:prstGeom>
+          <a:solidFill>
+            <a:srgbClr val="FFFFFF"/>
+          </a:solidFill>
+          <a:ln w="25400">
+            <a:solidFill>
+              <a:srgbClr val="3B7EC6"/>
+            </a:solidFill>
+          </a:ln>
+        </p:spPr>
+        <p:style>
+          <a:lnRef idx="1">
+            <a:schemeClr val="accent1"/>
+          </a:lnRef>
+          <a:fillRef idx="3">
+            <a:schemeClr val="accent1"/>
+          </a:fillRef>
+          <a:effectRef idx="2">
+            <a:schemeClr val="accent1"/>
+          </a:effectRef>
+          <a:fontRef idx="minor">
+            <a:schemeClr val="lt1"/>
+          </a:fontRef>
+        </p:style>
+        <p:txBody>
+          <a:bodyPr rtlCol="0" anchor="ctr"/>
+          <a:lstStyle/>
+          <a:p>
+            <a:pPr algn="ctr"/>
+          </a:p>
+        </p:txBody>
+      </p:sp>
+      <p:sp>
+        <p:nvSpPr>
+          <p:cNvPr id="44" name="Rectangle 43"/>
+          <p:cNvSpPr/>
+          <p:nvPr/>
+        </p:nvSpPr>
+        <p:spPr>
+          <a:xfrm>
+            <a:off x="1719072" y="5669280"/>
+            <a:ext cx="2121408" cy="12700"/>
+          </a:xfrm>
+          <a:prstGeom prst="rect">
+            <a:avLst/>
+          </a:prstGeom>
+          <a:ln w="19050">
+            <a:solidFill>
+              <a:srgbClr val="3B7EC6"/>
+            </a:solidFill>
+          </a:ln>
+        </p:spPr>
+        <p:style>
+          <a:lnRef idx="1">
+            <a:schemeClr val="accent1"/>
+          </a:lnRef>
+          <a:fillRef idx="3">
+            <a:schemeClr val="accent1"/>
+          </a:fillRef>
+          <a:effectRef idx="2">
+            <a:schemeClr val="accent1"/>
+          </a:effectRef>
+          <a:fontRef idx="minor">
+            <a:schemeClr val="lt1"/>
+          </a:fontRef>
+        </p:style>
+        <p:txBody>
+          <a:bodyPr rtlCol="0" anchor="ctr"/>
+          <a:lstStyle/>
+          <a:p>
+            <a:pPr algn="ctr"/>
+          </a:p>
+        </p:txBody>
+      </p:sp>
+      <p:sp>
+        <p:nvSpPr>
+          <p:cNvPr id="45" name="Rounded Rectangle 44"/>
+          <p:cNvSpPr/>
+          <p:nvPr/>
+        </p:nvSpPr>
+        <p:spPr>
+          <a:xfrm>
+            <a:off x="4901184" y="5404104"/>
+            <a:ext cx="5760720" cy="640080"/>
+          </a:xfrm>
+          <a:prstGeom prst="roundRect">
+            <a:avLst/>
+          </a:prstGeom>
+          <a:solidFill>
+            <a:srgbClr val="F0F4F8"/>
+          </a:solidFill>
+          <a:ln>
+            <a:noFill/>
+          </a:ln>
+        </p:spPr>
+        <p:style>
+          <a:lnRef idx="1">
+            <a:schemeClr val="accent1"/>
+          </a:lnRef>
+          <a:fillRef idx="3">
+            <a:schemeClr val="accent1"/>
+          </a:fillRef>
+          <a:effectRef idx="2">
+            <a:schemeClr val="accent1"/>
+          </a:effectRef>
+          <a:fontRef idx="minor">
+            <a:schemeClr val="lt1"/>
+          </a:fontRef>
+        </p:style>
+        <p:txBody>
+          <a:bodyPr rtlCol="0" anchor="ctr"/>
+          <a:lstStyle/>
+          <a:p>
+            <a:pPr algn="ctr"/>
+          </a:p>
+        </p:txBody>
+      </p:sp>
+      <p:sp>
+        <p:nvSpPr>
+          <p:cNvPr id="46" name="Rounded Rectangle 45"/>
+          <p:cNvSpPr/>
+          <p:nvPr/>
+        </p:nvSpPr>
+        <p:spPr>
+          <a:xfrm>
+            <a:off x="4846320" y="5349240"/>
+            <a:ext cx="5760720" cy="640080"/>
           </a:xfrm>
           <a:prstGeom prst="roundRect">
             <a:avLst/>
@@ -3958,7 +5033,7 @@
           </a:solidFill>
           <a:ln w="12700">
             <a:solidFill>
-              <a:srgbClr val="E0E0E0"/>
+              <a:srgbClr val="E8E8E8"/>
             </a:solidFill>
           </a:ln>
         </p:spPr>
@@ -3977,51 +5052,40 @@
           </a:fontRef>
         </p:style>
         <p:txBody>
-          <a:bodyPr rtlCol="0" anchor="ctr" lIns="182880"/>
-          <a:lstStyle/>
-          <a:p>
-            <a:pPr algn="l"/>
-            <a:r>
-              <a:rPr sz="1600" b="1">
+          <a:bodyPr rtlCol="0" anchor="ctr" lIns="274320" tIns="137160"/>
+          <a:lstStyle/>
+          <a:p>
+            <a:pPr algn="ctr"/>
+            <a:r>
+              <a:rPr sz="1800" b="1">
                 <a:solidFill>
-                  <a:srgbClr val="202020"/>
+                  <a:srgbClr val="000000"/>
                 </a:solidFill>
                 <a:latin typeface="Microsoft YaHei"/>
               </a:rPr>
-              <a:t>3. 设计规范：高度统一，建立</a:t>
-            </a:r>
-            <a:r>
-              <a:rPr sz="1600" b="1">
-                <a:solidFill>
-                  <a:srgbClr val="DF9A2A"/>
-                </a:solidFill>
-                <a:latin typeface="Microsoft YaHei"/>
-              </a:rPr>
-              <a:t>专业感</a:t>
-            </a:r>
-          </a:p>
-        </p:txBody>
-      </p:sp>
-      <p:sp>
-        <p:nvSpPr>
-          <p:cNvPr id="22" name="Rounded Rectangle 21"/>
+              <a:t>4. 高手境界：简洁有力的视觉哲学</a:t>
+            </a:r>
+          </a:p>
+        </p:txBody>
+      </p:sp>
+      <p:sp>
+        <p:nvSpPr>
+          <p:cNvPr id="47" name="Isosceles Triangle 46"/>
           <p:cNvSpPr/>
           <p:nvPr/>
         </p:nvSpPr>
         <p:spPr>
           <a:xfrm>
-            <a:off x="5303520" y="5486400"/>
-            <a:ext cx="5303520" cy="731520"/>
-          </a:xfrm>
-          <a:prstGeom prst="roundRect">
-            <a:avLst/>
-          </a:prstGeom>
-          <a:solidFill>
-            <a:srgbClr val="FFFFFF"/>
-          </a:solidFill>
-          <a:ln w="12700">
+            <a:off x="3840480" y="5394960"/>
+            <a:ext cx="594360" cy="457200"/>
+          </a:xfrm>
+          <a:prstGeom prst="triangle">
+            <a:avLst/>
+          </a:prstGeom>
+          <a:noFill/>
+          <a:ln w="25400">
             <a:solidFill>
-              <a:srgbClr val="E0E0E0"/>
+              <a:srgbClr val="3B7EC6"/>
             </a:solidFill>
           </a:ln>
         </p:spPr>
@@ -4040,25 +5104,354 @@
           </a:fontRef>
         </p:style>
         <p:txBody>
-          <a:bodyPr rtlCol="0" anchor="ctr" lIns="182880"/>
-          <a:lstStyle/>
-          <a:p>
-            <a:pPr algn="l"/>
-            <a:r>
-              <a:rPr sz="1600" b="1">
-                <a:solidFill>
-                  <a:srgbClr val="202020"/>
-                </a:solidFill>
-                <a:latin typeface="Microsoft YaHei"/>
-              </a:rPr>
-              <a:t>4. 高手境界：简洁有力的视觉哲学</a:t>
-            </a:r>
-          </a:p>
-        </p:txBody>
-      </p:sp>
-      <p:sp>
-        <p:nvSpPr>
-          <p:cNvPr id="23" name="TextBox 22"/>
+          <a:bodyPr rtlCol="0" anchor="ctr"/>
+          <a:lstStyle/>
+          <a:p>
+            <a:pPr algn="ctr"/>
+          </a:p>
+        </p:txBody>
+      </p:sp>
+      <p:sp>
+        <p:nvSpPr>
+          <p:cNvPr id="48" name="Isosceles Triangle 47"/>
+          <p:cNvSpPr/>
+          <p:nvPr/>
+        </p:nvSpPr>
+        <p:spPr>
+          <a:xfrm>
+            <a:off x="4041648" y="5394960"/>
+            <a:ext cx="192024" cy="137160"/>
+          </a:xfrm>
+          <a:prstGeom prst="triangle">
+            <a:avLst/>
+          </a:prstGeom>
+          <a:noFill/>
+          <a:ln w="19050">
+            <a:solidFill>
+              <a:srgbClr val="3B7EC6"/>
+            </a:solidFill>
+          </a:ln>
+        </p:spPr>
+        <p:style>
+          <a:lnRef idx="1">
+            <a:schemeClr val="accent1"/>
+          </a:lnRef>
+          <a:fillRef idx="3">
+            <a:schemeClr val="accent1"/>
+          </a:fillRef>
+          <a:effectRef idx="2">
+            <a:schemeClr val="accent1"/>
+          </a:effectRef>
+          <a:fontRef idx="minor">
+            <a:schemeClr val="lt1"/>
+          </a:fontRef>
+        </p:style>
+        <p:txBody>
+          <a:bodyPr rtlCol="0" anchor="ctr"/>
+          <a:lstStyle/>
+          <a:p>
+            <a:pPr algn="ctr"/>
+          </a:p>
+        </p:txBody>
+      </p:sp>
+      <p:sp>
+        <p:nvSpPr>
+          <p:cNvPr id="49" name="Isosceles Triangle 48"/>
+          <p:cNvSpPr/>
+          <p:nvPr/>
+        </p:nvSpPr>
+        <p:spPr>
+          <a:xfrm>
+            <a:off x="4709160" y="5760720"/>
+            <a:ext cx="274320" cy="91440"/>
+          </a:xfrm>
+          <a:prstGeom prst="triangle">
+            <a:avLst/>
+          </a:prstGeom>
+          <a:noFill/>
+          <a:ln w="19050">
+            <a:solidFill>
+              <a:srgbClr val="3B7EC6"/>
+            </a:solidFill>
+          </a:ln>
+        </p:spPr>
+        <p:style>
+          <a:lnRef idx="1">
+            <a:schemeClr val="accent1"/>
+          </a:lnRef>
+          <a:fillRef idx="3">
+            <a:schemeClr val="accent1"/>
+          </a:fillRef>
+          <a:effectRef idx="2">
+            <a:schemeClr val="accent1"/>
+          </a:effectRef>
+          <a:fontRef idx="minor">
+            <a:schemeClr val="lt1"/>
+          </a:fontRef>
+        </p:style>
+        <p:txBody>
+          <a:bodyPr rtlCol="0" anchor="ctr"/>
+          <a:lstStyle/>
+          <a:p>
+            <a:pPr algn="ctr"/>
+          </a:p>
+        </p:txBody>
+      </p:sp>
+      <p:sp>
+        <p:nvSpPr>
+          <p:cNvPr id="50" name="Rectangle 49"/>
+          <p:cNvSpPr/>
+          <p:nvPr/>
+        </p:nvSpPr>
+        <p:spPr>
+          <a:xfrm>
+            <a:off x="4846320" y="5394960"/>
+            <a:ext cx="12700" cy="365760"/>
+          </a:xfrm>
+          <a:prstGeom prst="rect">
+            <a:avLst/>
+          </a:prstGeom>
+          <a:ln w="25400">
+            <a:solidFill>
+              <a:srgbClr val="3B7EC6"/>
+            </a:solidFill>
+          </a:ln>
+        </p:spPr>
+        <p:style>
+          <a:lnRef idx="1">
+            <a:schemeClr val="accent1"/>
+          </a:lnRef>
+          <a:fillRef idx="3">
+            <a:schemeClr val="accent1"/>
+          </a:fillRef>
+          <a:effectRef idx="2">
+            <a:schemeClr val="accent1"/>
+          </a:effectRef>
+          <a:fontRef idx="minor">
+            <a:schemeClr val="lt1"/>
+          </a:fontRef>
+        </p:style>
+        <p:txBody>
+          <a:bodyPr rtlCol="0" anchor="ctr"/>
+          <a:lstStyle/>
+          <a:p>
+            <a:pPr algn="ctr"/>
+          </a:p>
+        </p:txBody>
+      </p:sp>
+      <p:sp>
+        <p:nvSpPr>
+          <p:cNvPr id="51" name="Rectangle 50"/>
+          <p:cNvSpPr/>
+          <p:nvPr/>
+        </p:nvSpPr>
+        <p:spPr>
+          <a:xfrm>
+            <a:off x="4572000" y="5486400"/>
+            <a:ext cx="548640" cy="12700"/>
+          </a:xfrm>
+          <a:prstGeom prst="rect">
+            <a:avLst/>
+          </a:prstGeom>
+          <a:ln w="25400">
+            <a:solidFill>
+              <a:srgbClr val="3B7EC6"/>
+            </a:solidFill>
+          </a:ln>
+        </p:spPr>
+        <p:style>
+          <a:lnRef idx="1">
+            <a:schemeClr val="accent1"/>
+          </a:lnRef>
+          <a:fillRef idx="3">
+            <a:schemeClr val="accent1"/>
+          </a:fillRef>
+          <a:effectRef idx="2">
+            <a:schemeClr val="accent1"/>
+          </a:effectRef>
+          <a:fontRef idx="minor">
+            <a:schemeClr val="lt1"/>
+          </a:fontRef>
+        </p:style>
+        <p:txBody>
+          <a:bodyPr rtlCol="0" anchor="ctr"/>
+          <a:lstStyle/>
+          <a:p>
+            <a:pPr algn="ctr"/>
+          </a:p>
+        </p:txBody>
+      </p:sp>
+      <p:sp>
+        <p:nvSpPr>
+          <p:cNvPr id="52" name="Rectangle 51"/>
+          <p:cNvSpPr/>
+          <p:nvPr/>
+        </p:nvSpPr>
+        <p:spPr>
+          <a:xfrm>
+            <a:off x="4617720" y="5486400"/>
+            <a:ext cx="12700" cy="182880"/>
+          </a:xfrm>
+          <a:prstGeom prst="rect">
+            <a:avLst/>
+          </a:prstGeom>
+          <a:ln>
+            <a:solidFill>
+              <a:srgbClr val="3B7EC6"/>
+            </a:solidFill>
+          </a:ln>
+        </p:spPr>
+        <p:style>
+          <a:lnRef idx="1">
+            <a:schemeClr val="accent1"/>
+          </a:lnRef>
+          <a:fillRef idx="3">
+            <a:schemeClr val="accent1"/>
+          </a:fillRef>
+          <a:effectRef idx="2">
+            <a:schemeClr val="accent1"/>
+          </a:effectRef>
+          <a:fontRef idx="minor">
+            <a:schemeClr val="lt1"/>
+          </a:fontRef>
+        </p:style>
+        <p:txBody>
+          <a:bodyPr rtlCol="0" anchor="ctr"/>
+          <a:lstStyle/>
+          <a:p>
+            <a:pPr algn="ctr"/>
+          </a:p>
+        </p:txBody>
+      </p:sp>
+      <p:sp>
+        <p:nvSpPr>
+          <p:cNvPr id="53" name="Rectangle 52"/>
+          <p:cNvSpPr/>
+          <p:nvPr/>
+        </p:nvSpPr>
+        <p:spPr>
+          <a:xfrm>
+            <a:off x="4526280" y="5669280"/>
+            <a:ext cx="182880" cy="12700"/>
+          </a:xfrm>
+          <a:prstGeom prst="rect">
+            <a:avLst/>
+          </a:prstGeom>
+          <a:ln w="19050">
+            <a:solidFill>
+              <a:srgbClr val="3B7EC6"/>
+            </a:solidFill>
+          </a:ln>
+        </p:spPr>
+        <p:style>
+          <a:lnRef idx="1">
+            <a:schemeClr val="accent1"/>
+          </a:lnRef>
+          <a:fillRef idx="3">
+            <a:schemeClr val="accent1"/>
+          </a:fillRef>
+          <a:effectRef idx="2">
+            <a:schemeClr val="accent1"/>
+          </a:effectRef>
+          <a:fontRef idx="minor">
+            <a:schemeClr val="lt1"/>
+          </a:fontRef>
+        </p:style>
+        <p:txBody>
+          <a:bodyPr rtlCol="0" anchor="ctr"/>
+          <a:lstStyle/>
+          <a:p>
+            <a:pPr algn="ctr"/>
+          </a:p>
+        </p:txBody>
+      </p:sp>
+      <p:sp>
+        <p:nvSpPr>
+          <p:cNvPr id="54" name="Rectangle 53"/>
+          <p:cNvSpPr/>
+          <p:nvPr/>
+        </p:nvSpPr>
+        <p:spPr>
+          <a:xfrm>
+            <a:off x="5074920" y="5486400"/>
+            <a:ext cx="12700" cy="182880"/>
+          </a:xfrm>
+          <a:prstGeom prst="rect">
+            <a:avLst/>
+          </a:prstGeom>
+          <a:ln>
+            <a:solidFill>
+              <a:srgbClr val="3B7EC6"/>
+            </a:solidFill>
+          </a:ln>
+        </p:spPr>
+        <p:style>
+          <a:lnRef idx="1">
+            <a:schemeClr val="accent1"/>
+          </a:lnRef>
+          <a:fillRef idx="3">
+            <a:schemeClr val="accent1"/>
+          </a:fillRef>
+          <a:effectRef idx="2">
+            <a:schemeClr val="accent1"/>
+          </a:effectRef>
+          <a:fontRef idx="minor">
+            <a:schemeClr val="lt1"/>
+          </a:fontRef>
+        </p:style>
+        <p:txBody>
+          <a:bodyPr rtlCol="0" anchor="ctr"/>
+          <a:lstStyle/>
+          <a:p>
+            <a:pPr algn="ctr"/>
+          </a:p>
+        </p:txBody>
+      </p:sp>
+      <p:sp>
+        <p:nvSpPr>
+          <p:cNvPr id="55" name="Rectangle 54"/>
+          <p:cNvSpPr/>
+          <p:nvPr/>
+        </p:nvSpPr>
+        <p:spPr>
+          <a:xfrm>
+            <a:off x="4983480" y="5669280"/>
+            <a:ext cx="182880" cy="12700"/>
+          </a:xfrm>
+          <a:prstGeom prst="rect">
+            <a:avLst/>
+          </a:prstGeom>
+          <a:ln w="19050">
+            <a:solidFill>
+              <a:srgbClr val="3B7EC6"/>
+            </a:solidFill>
+          </a:ln>
+        </p:spPr>
+        <p:style>
+          <a:lnRef idx="1">
+            <a:schemeClr val="accent1"/>
+          </a:lnRef>
+          <a:fillRef idx="3">
+            <a:schemeClr val="accent1"/>
+          </a:fillRef>
+          <a:effectRef idx="2">
+            <a:schemeClr val="accent1"/>
+          </a:effectRef>
+          <a:fontRef idx="minor">
+            <a:schemeClr val="lt1"/>
+          </a:fontRef>
+        </p:style>
+        <p:txBody>
+          <a:bodyPr rtlCol="0" anchor="ctr"/>
+          <a:lstStyle/>
+          <a:p>
+            <a:pPr algn="ctr"/>
+          </a:p>
+        </p:txBody>
+      </p:sp>
+      <p:sp>
+        <p:nvSpPr>
+          <p:cNvPr id="56" name="TextBox 55"/>
           <p:cNvSpPr txBox="1"/>
           <p:nvPr/>
         </p:nvSpPr>
@@ -4081,7 +5474,7 @@
             <a:pPr>
               <a:defRPr sz="1400">
                 <a:solidFill>
-                  <a:srgbClr val="808080"/>
+                  <a:srgbClr val="666666"/>
                 </a:solidFill>
                 <a:latin typeface="Arial"/>
               </a:defRPr>
